--- a/templates/posts/december/03-12-2026-thu-li-learn-see-teach.pptx
+++ b/templates/posts/december/03-12-2026-thu-li-learn-see-teach.pptx
@@ -3510,7 +3510,7 @@
       <p:grpSpPr/>
       <p:pic>
         <p:nvPicPr>
-          <p:cNvPr id="2" name="Picture 1" descr="8996270323336369867.jpg"/>
+          <p:cNvPr id="2" name="Picture 1" descr="4948609644068495993.jpg"/>
           <p:cNvPicPr>
             <a:picLocks noChangeAspect="1"/>
           </p:cNvPicPr>
